--- a/curso_es/pptx/S14.pptx
+++ b/curso_es/pptx/S14.pptx
@@ -3801,7 +3801,7 @@
                 </a:solidFill>
                 <a:latin typeface="Nunito Sans"/>
               </a:rPr>
-              <a:t>Omar propone alargar el recreo cinco minutos. Kevin: «Tú qué vas a proponer, si eres nuevo y no sabes ni dónde está el gimnasio».</a:t>
+              <a:t>Una chica propone alargar el recreo cinco minutos. Un chico: «Tú qué vas a proponer, si eres nueva y no sabes ni dónde está el gimnasio».</a:t>
             </a:r>
           </a:p>
         </p:txBody>
@@ -3849,7 +3849,7 @@
                 </a:solidFill>
                 <a:latin typeface="Nunito Sans"/>
               </a:rPr>
-              <a:t>¿Qué propone Omar? Alargar el recreo.</a:t>
+              <a:t>¿Qué propone la chica? Alargar el recreo.</a:t>
             </a:r>
           </a:p>
           <a:p>
@@ -3874,7 +3874,7 @@
                 </a:solidFill>
                 <a:latin typeface="Nunito Sans"/>
               </a:rPr>
-              <a:t>¿Qué responde Kevin? Habla de Omar, no del recreo.</a:t>
+              <a:t>¿Qué responde el chico? Habla de la chica, no del recreo.</a:t>
             </a:r>
           </a:p>
           <a:p>
@@ -3899,7 +3899,7 @@
                 </a:solidFill>
                 <a:latin typeface="Nunito Sans"/>
               </a:rPr>
-              <a:t>¿Qué tiene que ver ser nuevo con la idea? Nada: la idea es buena o mala igual.</a:t>
+              <a:t>¿Qué tiene que ver ser nueva con la idea? Nada: la idea es buena o mala igual.</a:t>
             </a:r>
           </a:p>
           <a:p>
@@ -3924,7 +3924,7 @@
                 </a:solidFill>
                 <a:latin typeface="Nunito Sans"/>
               </a:rPr>
-              <a:t>Conclusión: ataque a la persona. La propuesta de Omar sigue sin respuesta.</a:t>
+              <a:t>Conclusión: ataque a la persona. La propuesta de la chica sigue sin respuesta.</a:t>
             </a:r>
           </a:p>
         </p:txBody>
@@ -4110,7 +4110,7 @@
                 </a:solidFill>
                 <a:latin typeface="Nunito Sans"/>
               </a:rPr>
-              <a:t>La madre de Yasmin: «Deja ya el móvil, llevas tres horas». Yasmin: «¡Pues anda que tú, siempre con el WhatsApp!».</a:t>
+              <a:t>La madre de una chica: «Deja ya el móvil, llevas tres horas». La chica: «¡Pues anda que tú, siempre con el WhatsApp!».</a:t>
             </a:r>
           </a:p>
         </p:txBody>
@@ -4183,7 +4183,7 @@
                 </a:solidFill>
                 <a:latin typeface="Nunito Sans"/>
               </a:rPr>
-              <a:t>¿Qué responde Yasmin? Que su madre también lo usa mucho.</a:t>
+              <a:t>¿Qué responde la chica? Que su madre también lo usa mucho.</a:t>
             </a:r>
           </a:p>
           <a:p>
@@ -5296,7 +5296,7 @@
                 </a:solidFill>
                 <a:latin typeface="Nunito Sans"/>
               </a:rPr>
-              <a:t>Omar, el delegado, pide en clase: «Respetad el turno de palabra». Luego interrumpe a todos. Naiara: «Pides respetar el turno y tú no lo respetas».</a:t>
+              <a:t>Un chico, el delegado, pide en clase: «Respetad el turno de palabra». Luego interrumpe a todos. Una chica: «Pides respetar el turno y tú no lo respetas».</a:t>
             </a:r>
           </a:p>
         </p:txBody>
@@ -5369,7 +5369,7 @@
                 </a:solidFill>
                 <a:latin typeface="Nunito Sans"/>
               </a:rPr>
-              <a:t>Naiara no dice que la norma sea mala. No la usa para librarse de cumplirla.</a:t>
+              <a:t>La chica no dice que la norma sea mala. No la usa para librarse de cumplirla.</a:t>
             </a:r>
           </a:p>
           <a:p>
@@ -5412,7 +5412,7 @@
                 </a:solidFill>
                 <a:latin typeface="Nunito Sans"/>
               </a:rPr>
-              <a:t> real: Omar pide algo que él no hace.</a:t>
+              <a:t> real: el delegado pide algo que él no hace.</a:t>
             </a:r>
           </a:p>
           <a:p>
@@ -7040,7 +7040,7 @@
                 </a:solidFill>
                 <a:latin typeface="Nunito Sans"/>
               </a:rPr>
-              <a:t>Omar propone alargar el recreo cinco minutos. Kevin contesta: «Tú qué vas a proponer, si eres nuevo y no sabes ni dónde está el gimnasio».</a:t>
+              <a:t>Una chica propone alargar el recreo cinco minutos. Un chico contesta: «Tú qué vas a proponer, si eres nueva y no sabes ni dónde está el gimnasio».</a:t>
             </a:r>
           </a:p>
         </p:txBody>
@@ -7079,7 +7079,7 @@
                 </a:solidFill>
                 <a:latin typeface="Nunito Sans"/>
               </a:rPr>
-              <a:t>¿Ha dicho Kevin algo sobre si la idea de Omar es buena?</a:t>
+              <a:t>¿Ha dicho ese chico algo sobre si la idea de la chica es buena?</a:t>
             </a:r>
           </a:p>
         </p:txBody>
